--- a/decks/geog-resources/geog-resources_ch2_uk-food-and-water.pptx
+++ b/decks/geog-resources/geog-resources_ch2_uk-food-and-water.pptx
@@ -126,30 +126,30 @@
   <p:extLst>
     <p:ext uri="{521415D9-36F7-43E2-AB2F-B90AF26B5E84}">
       <p14:sectionLst xmlns:p14="http://schemas.microsoft.com/office/powerpoint/2010/main">
-        <p14:section name="Opening" id="{4fef8891-84e0-64a9-58b9-0749ee1ad38a}">
+        <p14:section name="Opening" id="{fc29648b-2327-658e-7581-7adac95337fc}">
           <p14:sldIdLst>
             <p14:sldId id="256"/>
           </p14:sldIdLst>
         </p14:section>
-        <p14:section name="Gate" id="{fa02a3e3-32f3-e01c-e983-4de1a3da50ca}">
+        <p14:section name="Gate" id="{27423875-0eda-1aa6-e05e-3575fb30d3a6}">
           <p14:sldIdLst>
             <p14:sldId id="257"/>
             <p14:sldId id="258"/>
           </p14:sldIdLst>
         </p14:section>
-        <p14:section name="Pre-teach" id="{56310957-61da-9bdb-433d-220207f8ee3e}">
+        <p14:section name="Pre-teach" id="{bf88be13-d31c-4940-1f6e-a78ee212fe00}">
           <p14:sldIdLst>
             <p14:sldId id="259"/>
             <p14:sldId id="260"/>
           </p14:sldIdLst>
         </p14:section>
-        <p14:section name="Read-along" id="{c3cffc6e-9b5b-dfad-124e-1976bd906d28}">
+        <p14:section name="Read-along" id="{f85f24a1-980d-a1b3-87d4-9a4e3e7cac7b}">
           <p14:sldIdLst>
             <p14:sldId id="261"/>
             <p14:sldId id="262"/>
           </p14:sldIdLst>
         </p14:section>
-        <p14:section name="Teach" id="{5d645f00-e563-0f9b-8348-d386a39d6ba8}">
+        <p14:section name="Teach" id="{c5c0b7db-62df-644e-72ff-ee5c756fbcd2}">
           <p14:sldIdLst>
             <p14:sldId id="263"/>
             <p14:sldId id="264"/>
@@ -158,7 +158,7 @@
             <p14:sldId id="267"/>
           </p14:sldIdLst>
         </p14:section>
-        <p14:section name="Routes" id="{3fb0bced-3dc7-7a83-2fc3-33da032e5f90}">
+        <p14:section name="Routes" id="{b4092fe1-9e0b-d3c8-441f-514b2689d792}">
           <p14:sldIdLst>
             <p14:sldId id="268"/>
             <p14:sldId id="269"/>
@@ -166,12 +166,12 @@
             <p14:sldId id="271"/>
           </p14:sldIdLst>
         </p14:section>
-        <p14:section name="Close" id="{8172aa4f-a678-10ca-6e42-f05602c9605f}">
+        <p14:section name="Close" id="{3faac9a5-0d72-c96f-473b-53432ac54e63}">
           <p14:sldIdLst>
             <p14:sldId id="272"/>
           </p14:sldIdLst>
         </p14:section>
-        <p14:section name="Answers" id="{ccb273d3-31ba-b1f9-cf86-2d4cee760f47}">
+        <p14:section name="Answers" id="{96def00d-f2de-f609-a6d1-54ba68f8de1c}">
           <p14:sldIdLst>
             <p14:sldId id="273"/>
             <p14:sldId id="274"/>
